--- a/runs/great-eastern/2026-10-26-run6/deck-exec-v4/PLUMB-GEH-preread-v4-DRAFT.pptx
+++ b/runs/great-eastern/2026-10-26-run6/deck-exec-v4/PLUMB-GEH-preread-v4-DRAFT.pptx
@@ -4150,7 +4150,7 @@
         <p:spPr>
           <a:xfrm>
             <a:off x="548640" y="1554480"/>
-            <a:ext cx="3515258" cy="2880360"/>
+            <a:ext cx="3515258" cy="3063240"/>
           </a:xfrm>
           <a:prstGeom prst="rect">
             <a:avLst/>
@@ -4263,7 +4263,7 @@
         <p:spPr>
           <a:xfrm>
             <a:off x="932688" y="3703320"/>
-            <a:ext cx="2747162" cy="594360"/>
+            <a:ext cx="2747162" cy="731520"/>
           </a:xfrm>
           <a:prstGeom prst="rect">
             <a:avLst/>
@@ -4302,7 +4302,7 @@
         <p:spPr>
           <a:xfrm>
             <a:off x="4338218" y="1554480"/>
-            <a:ext cx="3515258" cy="2880360"/>
+            <a:ext cx="3515258" cy="3063240"/>
           </a:xfrm>
           <a:prstGeom prst="rect">
             <a:avLst/>
@@ -4415,7 +4415,7 @@
         <p:spPr>
           <a:xfrm>
             <a:off x="4722266" y="3703320"/>
-            <a:ext cx="2747162" cy="594360"/>
+            <a:ext cx="2747162" cy="731520"/>
           </a:xfrm>
           <a:prstGeom prst="rect">
             <a:avLst/>
@@ -4454,7 +4454,7 @@
         <p:spPr>
           <a:xfrm>
             <a:off x="8127797" y="1554480"/>
-            <a:ext cx="3515258" cy="2880360"/>
+            <a:ext cx="3515258" cy="3063240"/>
           </a:xfrm>
           <a:prstGeom prst="rect">
             <a:avLst/>
@@ -4567,7 +4567,7 @@
         <p:spPr>
           <a:xfrm>
             <a:off x="8511845" y="3703320"/>
-            <a:ext cx="2747162" cy="594360"/>
+            <a:ext cx="2747162" cy="731520"/>
           </a:xfrm>
           <a:prstGeom prst="rect">
             <a:avLst/>
